--- a/8ass/8ass.pptx
+++ b/8ass/8ass.pptx
@@ -20,6 +20,8 @@
     <p:sldId id="271" r:id="rId14"/>
     <p:sldId id="272" r:id="rId15"/>
     <p:sldId id="273" r:id="rId16"/>
+    <p:sldId id="274" r:id="rId17"/>
+    <p:sldId id="275" r:id="rId18"/>
   </p:sldIdLst>
   <p:sldSz cx="12192000" cy="6858000"/>
   <p:notesSz cx="6858000" cy="9144000"/>
@@ -118,6 +120,11 @@
       </a:defRPr>
     </a:lvl9pPr>
   </p:defaultTextStyle>
+  <p:extLst>
+    <p:ext uri="{EFAFB233-063F-42B5-8137-9DF3F51BA10A}">
+      <p15:sldGuideLst xmlns:p15="http://schemas.microsoft.com/office/powerpoint/2012/main"/>
+    </p:ext>
+  </p:extLst>
 </p:presentation>
 </file>
 
@@ -270,7 +277,7 @@
           <a:p>
             <a:fld id="{89AD1261-9EED-2246-A353-D243FB9E7EC9}" type="datetimeFigureOut">
               <a:rPr lang="en-IL" smtClean="0"/>
-              <a:t>12/02/2023</a:t>
+              <a:t>13/02/2023</a:t>
             </a:fld>
             <a:endParaRPr lang="en-IL"/>
           </a:p>
@@ -470,7 +477,7 @@
           <a:p>
             <a:fld id="{89AD1261-9EED-2246-A353-D243FB9E7EC9}" type="datetimeFigureOut">
               <a:rPr lang="en-IL" smtClean="0"/>
-              <a:t>12/02/2023</a:t>
+              <a:t>13/02/2023</a:t>
             </a:fld>
             <a:endParaRPr lang="en-IL"/>
           </a:p>
@@ -680,7 +687,7 @@
           <a:p>
             <a:fld id="{89AD1261-9EED-2246-A353-D243FB9E7EC9}" type="datetimeFigureOut">
               <a:rPr lang="en-IL" smtClean="0"/>
-              <a:t>12/02/2023</a:t>
+              <a:t>13/02/2023</a:t>
             </a:fld>
             <a:endParaRPr lang="en-IL"/>
           </a:p>
@@ -880,7 +887,7 @@
           <a:p>
             <a:fld id="{89AD1261-9EED-2246-A353-D243FB9E7EC9}" type="datetimeFigureOut">
               <a:rPr lang="en-IL" smtClean="0"/>
-              <a:t>12/02/2023</a:t>
+              <a:t>13/02/2023</a:t>
             </a:fld>
             <a:endParaRPr lang="en-IL"/>
           </a:p>
@@ -1156,7 +1163,7 @@
           <a:p>
             <a:fld id="{89AD1261-9EED-2246-A353-D243FB9E7EC9}" type="datetimeFigureOut">
               <a:rPr lang="en-IL" smtClean="0"/>
-              <a:t>12/02/2023</a:t>
+              <a:t>13/02/2023</a:t>
             </a:fld>
             <a:endParaRPr lang="en-IL"/>
           </a:p>
@@ -1424,7 +1431,7 @@
           <a:p>
             <a:fld id="{89AD1261-9EED-2246-A353-D243FB9E7EC9}" type="datetimeFigureOut">
               <a:rPr lang="en-IL" smtClean="0"/>
-              <a:t>12/02/2023</a:t>
+              <a:t>13/02/2023</a:t>
             </a:fld>
             <a:endParaRPr lang="en-IL"/>
           </a:p>
@@ -1839,7 +1846,7 @@
           <a:p>
             <a:fld id="{89AD1261-9EED-2246-A353-D243FB9E7EC9}" type="datetimeFigureOut">
               <a:rPr lang="en-IL" smtClean="0"/>
-              <a:t>12/02/2023</a:t>
+              <a:t>13/02/2023</a:t>
             </a:fld>
             <a:endParaRPr lang="en-IL"/>
           </a:p>
@@ -1981,7 +1988,7 @@
           <a:p>
             <a:fld id="{89AD1261-9EED-2246-A353-D243FB9E7EC9}" type="datetimeFigureOut">
               <a:rPr lang="en-IL" smtClean="0"/>
-              <a:t>12/02/2023</a:t>
+              <a:t>13/02/2023</a:t>
             </a:fld>
             <a:endParaRPr lang="en-IL"/>
           </a:p>
@@ -2094,7 +2101,7 @@
           <a:p>
             <a:fld id="{89AD1261-9EED-2246-A353-D243FB9E7EC9}" type="datetimeFigureOut">
               <a:rPr lang="en-IL" smtClean="0"/>
-              <a:t>12/02/2023</a:t>
+              <a:t>13/02/2023</a:t>
             </a:fld>
             <a:endParaRPr lang="en-IL"/>
           </a:p>
@@ -2407,7 +2414,7 @@
           <a:p>
             <a:fld id="{89AD1261-9EED-2246-A353-D243FB9E7EC9}" type="datetimeFigureOut">
               <a:rPr lang="en-IL" smtClean="0"/>
-              <a:t>12/02/2023</a:t>
+              <a:t>13/02/2023</a:t>
             </a:fld>
             <a:endParaRPr lang="en-IL"/>
           </a:p>
@@ -2696,7 +2703,7 @@
           <a:p>
             <a:fld id="{89AD1261-9EED-2246-A353-D243FB9E7EC9}" type="datetimeFigureOut">
               <a:rPr lang="en-IL" smtClean="0"/>
-              <a:t>12/02/2023</a:t>
+              <a:t>13/02/2023</a:t>
             </a:fld>
             <a:endParaRPr lang="en-IL"/>
           </a:p>
@@ -2939,7 +2946,7 @@
           <a:p>
             <a:fld id="{89AD1261-9EED-2246-A353-D243FB9E7EC9}" type="datetimeFigureOut">
               <a:rPr lang="en-IL" smtClean="0"/>
-              <a:t>12/02/2023</a:t>
+              <a:t>13/02/2023</a:t>
             </a:fld>
             <a:endParaRPr lang="en-IL"/>
           </a:p>
@@ -4465,6 +4472,261 @@
 </p:sld>
 </file>
 
+<file path=ppt/slides/slide16.xml><?xml version="1.0" encoding="utf-8"?>
+<p:sld xmlns:a="http://schemas.openxmlformats.org/drawingml/2006/main" xmlns:r="http://schemas.openxmlformats.org/officeDocument/2006/relationships" xmlns:p="http://schemas.openxmlformats.org/presentationml/2006/main">
+  <p:cSld>
+    <p:bg>
+      <p:bgPr>
+        <a:solidFill>
+          <a:schemeClr val="bg1"/>
+        </a:solidFill>
+        <a:effectLst/>
+      </p:bgPr>
+    </p:bg>
+    <p:spTree>
+      <p:nvGrpSpPr>
+        <p:cNvPr id="1" name=""/>
+        <p:cNvGrpSpPr/>
+        <p:nvPr/>
+      </p:nvGrpSpPr>
+      <p:grpSpPr>
+        <a:xfrm>
+          <a:off x="0" y="0"/>
+          <a:ext cx="0" cy="0"/>
+          <a:chOff x="0" y="0"/>
+          <a:chExt cx="0" cy="0"/>
+        </a:xfrm>
+      </p:grpSpPr>
+      <p:sp>
+        <p:nvSpPr>
+          <p:cNvPr id="2" name="Title 1">
+            <a:extLst>
+              <a:ext uri="{FF2B5EF4-FFF2-40B4-BE49-F238E27FC236}">
+                <a16:creationId xmlns:a16="http://schemas.microsoft.com/office/drawing/2014/main" id="{00CE3BCB-D890-C62E-E220-8BDE1D3C912F}"/>
+              </a:ext>
+            </a:extLst>
+          </p:cNvPr>
+          <p:cNvSpPr>
+            <a:spLocks noGrp="1"/>
+          </p:cNvSpPr>
+          <p:nvPr>
+            <p:ph type="title"/>
+          </p:nvPr>
+        </p:nvSpPr>
+        <p:spPr>
+          <a:xfrm>
+            <a:off x="481013" y="3752849"/>
+            <a:ext cx="3290887" cy="2452687"/>
+          </a:xfrm>
+        </p:spPr>
+        <p:txBody>
+          <a:bodyPr anchor="ctr">
+            <a:normAutofit/>
+          </a:bodyPr>
+          <a:lstStyle/>
+          <a:p>
+            <a:r>
+              <a:rPr lang="en-US" sz="3600"/>
+              <a:t>backdrop-filter</a:t>
+            </a:r>
+            <a:endParaRPr lang="en-IL" sz="3600"/>
+          </a:p>
+        </p:txBody>
+      </p:sp>
+      <p:pic>
+        <p:nvPicPr>
+          <p:cNvPr id="5" name="Picture 4" descr="Text, logo&#10;&#10;Description automatically generated with medium confidence">
+            <a:extLst>
+              <a:ext uri="{FF2B5EF4-FFF2-40B4-BE49-F238E27FC236}">
+                <a16:creationId xmlns:a16="http://schemas.microsoft.com/office/drawing/2014/main" id="{3AECCC95-FBFD-9354-61AE-3BC6B52C7CA6}"/>
+              </a:ext>
+            </a:extLst>
+          </p:cNvPr>
+          <p:cNvPicPr>
+            <a:picLocks noChangeAspect="1"/>
+          </p:cNvPicPr>
+          <p:nvPr/>
+        </p:nvPicPr>
+        <p:blipFill rotWithShape="1">
+          <a:blip r:embed="rId2"/>
+          <a:srcRect r="3599" b="1"/>
+          <a:stretch/>
+        </p:blipFill>
+        <p:spPr>
+          <a:xfrm>
+            <a:off x="20" y="10"/>
+            <a:ext cx="12191980" cy="3710603"/>
+          </a:xfrm>
+          <a:custGeom>
+            <a:avLst/>
+            <a:gdLst/>
+            <a:ahLst/>
+            <a:cxnLst/>
+            <a:rect l="l" t="t" r="r" b="b"/>
+            <a:pathLst>
+              <a:path w="12192000" h="3692092">
+                <a:moveTo>
+                  <a:pt x="0" y="0"/>
+                </a:moveTo>
+                <a:lnTo>
+                  <a:pt x="12192000" y="0"/>
+                </a:lnTo>
+                <a:lnTo>
+                  <a:pt x="12192000" y="3504824"/>
+                </a:lnTo>
+                <a:lnTo>
+                  <a:pt x="12024691" y="3517794"/>
+                </a:lnTo>
+                <a:cubicBezTo>
+                  <a:pt x="8077523" y="3783195"/>
+                  <a:pt x="4094678" y="3026959"/>
+                  <a:pt x="160485" y="3663863"/>
+                </a:cubicBezTo>
+                <a:lnTo>
+                  <a:pt x="0" y="3692092"/>
+                </a:lnTo>
+                <a:close/>
+              </a:path>
+            </a:pathLst>
+          </a:custGeom>
+        </p:spPr>
+      </p:pic>
+      <p:sp>
+        <p:nvSpPr>
+          <p:cNvPr id="3" name="Content Placeholder 2">
+            <a:extLst>
+              <a:ext uri="{FF2B5EF4-FFF2-40B4-BE49-F238E27FC236}">
+                <a16:creationId xmlns:a16="http://schemas.microsoft.com/office/drawing/2014/main" id="{EE5F6CFB-51C5-5755-7FD5-B375F62EC61F}"/>
+              </a:ext>
+            </a:extLst>
+          </p:cNvPr>
+          <p:cNvSpPr>
+            <a:spLocks noGrp="1"/>
+          </p:cNvSpPr>
+          <p:nvPr>
+            <p:ph idx="1"/>
+          </p:nvPr>
+        </p:nvSpPr>
+        <p:spPr>
+          <a:xfrm>
+            <a:off x="4223982" y="3752850"/>
+            <a:ext cx="7485413" cy="2452687"/>
+          </a:xfrm>
+        </p:spPr>
+        <p:txBody>
+          <a:bodyPr anchor="ctr">
+            <a:normAutofit/>
+          </a:bodyPr>
+          <a:lstStyle/>
+          <a:p>
+            <a:r>
+              <a:rPr lang="en-US" sz="1800"/>
+              <a:t>backdrop-filter is a CSS property that allows you to apply graphical effects, such as blurring or color shifting, to the area behind an element. It provides a way to create a visual effect that makes the content behind an element more prominent or less obtrusive.</a:t>
+            </a:r>
+            <a:endParaRPr lang="en-IL" sz="1800"/>
+          </a:p>
+        </p:txBody>
+      </p:sp>
+    </p:spTree>
+    <p:extLst>
+      <p:ext uri="{BB962C8B-B14F-4D97-AF65-F5344CB8AC3E}">
+        <p14:creationId xmlns:p14="http://schemas.microsoft.com/office/powerpoint/2010/main" val="2164361081"/>
+      </p:ext>
+    </p:extLst>
+  </p:cSld>
+  <p:clrMapOvr>
+    <a:masterClrMapping/>
+  </p:clrMapOvr>
+</p:sld>
+</file>
+
+<file path=ppt/slides/slide17.xml><?xml version="1.0" encoding="utf-8"?>
+<p:sld xmlns:a="http://schemas.openxmlformats.org/drawingml/2006/main" xmlns:r="http://schemas.openxmlformats.org/officeDocument/2006/relationships" xmlns:p="http://schemas.openxmlformats.org/presentationml/2006/main">
+  <p:cSld>
+    <p:spTree>
+      <p:nvGrpSpPr>
+        <p:cNvPr id="1" name=""/>
+        <p:cNvGrpSpPr/>
+        <p:nvPr/>
+      </p:nvGrpSpPr>
+      <p:grpSpPr>
+        <a:xfrm>
+          <a:off x="0" y="0"/>
+          <a:ext cx="0" cy="0"/>
+          <a:chOff x="0" y="0"/>
+          <a:chExt cx="0" cy="0"/>
+        </a:xfrm>
+      </p:grpSpPr>
+      <p:sp>
+        <p:nvSpPr>
+          <p:cNvPr id="2" name="Title 1">
+            <a:extLst>
+              <a:ext uri="{FF2B5EF4-FFF2-40B4-BE49-F238E27FC236}">
+                <a16:creationId xmlns:a16="http://schemas.microsoft.com/office/drawing/2014/main" id="{CB3DD513-54C8-0BDD-B26F-70AB6B7FB738}"/>
+              </a:ext>
+            </a:extLst>
+          </p:cNvPr>
+          <p:cNvSpPr>
+            <a:spLocks noGrp="1"/>
+          </p:cNvSpPr>
+          <p:nvPr>
+            <p:ph type="title"/>
+          </p:nvPr>
+        </p:nvSpPr>
+        <p:spPr/>
+        <p:txBody>
+          <a:bodyPr/>
+          <a:lstStyle/>
+          <a:p>
+            <a:r>
+              <a:rPr lang="en-US" dirty="0"/>
+              <a:t>E</a:t>
+            </a:r>
+            <a:r>
+              <a:rPr lang="en-IL" dirty="0"/>
+              <a:t>xample</a:t>
+            </a:r>
+          </a:p>
+        </p:txBody>
+      </p:sp>
+      <p:sp>
+        <p:nvSpPr>
+          <p:cNvPr id="3" name="Content Placeholder 2">
+            <a:extLst>
+              <a:ext uri="{FF2B5EF4-FFF2-40B4-BE49-F238E27FC236}">
+                <a16:creationId xmlns:a16="http://schemas.microsoft.com/office/drawing/2014/main" id="{9D3BA769-93DC-429A-DED8-1DD694EDC239}"/>
+              </a:ext>
+            </a:extLst>
+          </p:cNvPr>
+          <p:cNvSpPr>
+            <a:spLocks noGrp="1"/>
+          </p:cNvSpPr>
+          <p:nvPr>
+            <p:ph idx="1"/>
+          </p:nvPr>
+        </p:nvSpPr>
+        <p:spPr/>
+        <p:txBody>
+          <a:bodyPr/>
+          <a:lstStyle/>
+          <a:p>
+            <a:endParaRPr lang="en-IL"/>
+          </a:p>
+        </p:txBody>
+      </p:sp>
+    </p:spTree>
+    <p:extLst>
+      <p:ext uri="{BB962C8B-B14F-4D97-AF65-F5344CB8AC3E}">
+        <p14:creationId xmlns:p14="http://schemas.microsoft.com/office/powerpoint/2010/main" val="441612827"/>
+      </p:ext>
+    </p:extLst>
+  </p:cSld>
+  <p:clrMapOvr>
+    <a:masterClrMapping/>
+  </p:clrMapOvr>
+</p:sld>
+</file>
+
 <file path=ppt/slides/slide2.xml><?xml version="1.0" encoding="utf-8"?>
 <p:sld xmlns:a="http://schemas.openxmlformats.org/drawingml/2006/main" xmlns:r="http://schemas.openxmlformats.org/officeDocument/2006/relationships" xmlns:p="http://schemas.openxmlformats.org/presentationml/2006/main">
   <p:cSld>
